--- a/03-课件PPT/讲次版/第5章-2-讲次 5-2 · Subagent 任务委托与聚合.pptx
+++ b/03-课件PPT/讲次版/第5章-2-讲次 5-2 · Subagent 任务委托与聚合.pptx
@@ -8683,7 +8683,7 @@
                 </a:solidFill>
                 <a:latin typeface="PingFang SC"/>
               </a:rPr>
-              <a:t>4. 终稿+引用保留|复核是聚合最后一关</a:t>
+              <a:t>4. 终稿+引用保留</a:t>
             </a:r>
           </a:p>
         </p:txBody>
@@ -10896,21 +10896,375 @@
                 </a:solidFill>
                 <a:latin typeface="PingFang SC"/>
               </a:rPr>
-              <a:t>仲裁实测输出,$ report = await sup.run(争议任务, tasks, workers);Conflict(field='verdict', conclusions=['结论甲','结论乙']);arbitrated_verdict='结论乙'  # 证据×3&gt;×1;# 同 aspect 才冲突:误报为零</a:t>
-            </a:r>
-          </a:p>
-        </p:txBody>
-      </p:sp>
-      <p:sp>
-        <p:nvSpPr>
-          <p:cNvPr id="5" name="TextBox 4"/>
+              <a:t>仲裁实测输出</a:t>
+            </a:r>
+          </a:p>
+        </p:txBody>
+      </p:sp>
+      <p:sp>
+        <p:nvSpPr>
+          <p:cNvPr id="5" name="Rounded Rectangle 4"/>
+          <p:cNvSpPr/>
+          <p:nvPr/>
+        </p:nvSpPr>
+        <p:spPr>
+          <a:xfrm>
+            <a:off x="1333500" y="1047750"/>
+            <a:ext cx="9525000" cy="2381250"/>
+          </a:xfrm>
+          <a:prstGeom prst="roundRect">
+            <a:avLst>
+              <a:gd name="adj" fmla="val 8000"/>
+            </a:avLst>
+          </a:prstGeom>
+          <a:solidFill>
+            <a:srgbClr val="0D1117"/>
+          </a:solidFill>
+          <a:ln>
+            <a:noFill/>
+          </a:ln>
+          <a:effectLst/>
+        </p:spPr>
+        <p:style>
+          <a:lnRef idx="1">
+            <a:schemeClr val="accent1"/>
+          </a:lnRef>
+          <a:fillRef idx="3">
+            <a:schemeClr val="accent1"/>
+          </a:fillRef>
+          <a:effectRef idx="2">
+            <a:schemeClr val="accent1"/>
+          </a:effectRef>
+          <a:fontRef idx="minor">
+            <a:schemeClr val="lt1"/>
+          </a:fontRef>
+        </p:style>
+        <p:txBody>
+          <a:bodyPr rtlCol="0" anchor="ctr"/>
+          <a:lstStyle/>
+          <a:p>
+            <a:pPr algn="ctr"/>
+          </a:p>
+        </p:txBody>
+      </p:sp>
+      <p:sp>
+        <p:nvSpPr>
+          <p:cNvPr id="6" name="Rectangle 5"/>
+          <p:cNvSpPr/>
+          <p:nvPr/>
+        </p:nvSpPr>
+        <p:spPr>
+          <a:xfrm>
+            <a:off x="1333500" y="1047750"/>
+            <a:ext cx="9525000" cy="381000"/>
+          </a:xfrm>
+          <a:prstGeom prst="rect">
+            <a:avLst/>
+          </a:prstGeom>
+          <a:solidFill>
+            <a:srgbClr val="1F2937"/>
+          </a:solidFill>
+          <a:ln>
+            <a:noFill/>
+          </a:ln>
+          <a:effectLst/>
+        </p:spPr>
+        <p:style>
+          <a:lnRef idx="1">
+            <a:schemeClr val="accent1"/>
+          </a:lnRef>
+          <a:fillRef idx="3">
+            <a:schemeClr val="accent1"/>
+          </a:fillRef>
+          <a:effectRef idx="2">
+            <a:schemeClr val="accent1"/>
+          </a:effectRef>
+          <a:fontRef idx="minor">
+            <a:schemeClr val="lt1"/>
+          </a:fontRef>
+        </p:style>
+        <p:txBody>
+          <a:bodyPr rtlCol="0" anchor="ctr"/>
+          <a:lstStyle/>
+          <a:p>
+            <a:pPr algn="ctr"/>
+          </a:p>
+        </p:txBody>
+      </p:sp>
+      <p:sp>
+        <p:nvSpPr>
+          <p:cNvPr id="7" name="Rounded Rectangle 6"/>
+          <p:cNvSpPr/>
+          <p:nvPr/>
+        </p:nvSpPr>
+        <p:spPr>
+          <a:xfrm>
+            <a:off x="1504950" y="1181100"/>
+            <a:ext cx="123825" cy="123825"/>
+          </a:xfrm>
+          <a:prstGeom prst="roundRect">
+            <a:avLst>
+              <a:gd name="adj" fmla="val 8000"/>
+            </a:avLst>
+          </a:prstGeom>
+          <a:solidFill>
+            <a:srgbClr val="F87171"/>
+          </a:solidFill>
+          <a:ln>
+            <a:noFill/>
+          </a:ln>
+          <a:effectLst/>
+        </p:spPr>
+        <p:style>
+          <a:lnRef idx="1">
+            <a:schemeClr val="accent1"/>
+          </a:lnRef>
+          <a:fillRef idx="3">
+            <a:schemeClr val="accent1"/>
+          </a:fillRef>
+          <a:effectRef idx="2">
+            <a:schemeClr val="accent1"/>
+          </a:effectRef>
+          <a:fontRef idx="minor">
+            <a:schemeClr val="lt1"/>
+          </a:fontRef>
+        </p:style>
+        <p:txBody>
+          <a:bodyPr rtlCol="0" anchor="ctr"/>
+          <a:lstStyle/>
+          <a:p>
+            <a:pPr algn="ctr"/>
+          </a:p>
+        </p:txBody>
+      </p:sp>
+      <p:sp>
+        <p:nvSpPr>
+          <p:cNvPr id="8" name="Rounded Rectangle 7"/>
+          <p:cNvSpPr/>
+          <p:nvPr/>
+        </p:nvSpPr>
+        <p:spPr>
+          <a:xfrm>
+            <a:off x="1752600" y="1181100"/>
+            <a:ext cx="123825" cy="123825"/>
+          </a:xfrm>
+          <a:prstGeom prst="roundRect">
+            <a:avLst>
+              <a:gd name="adj" fmla="val 8000"/>
+            </a:avLst>
+          </a:prstGeom>
+          <a:solidFill>
+            <a:srgbClr val="F59E0B"/>
+          </a:solidFill>
+          <a:ln>
+            <a:noFill/>
+          </a:ln>
+          <a:effectLst/>
+        </p:spPr>
+        <p:style>
+          <a:lnRef idx="1">
+            <a:schemeClr val="accent1"/>
+          </a:lnRef>
+          <a:fillRef idx="3">
+            <a:schemeClr val="accent1"/>
+          </a:fillRef>
+          <a:effectRef idx="2">
+            <a:schemeClr val="accent1"/>
+          </a:effectRef>
+          <a:fontRef idx="minor">
+            <a:schemeClr val="lt1"/>
+          </a:fontRef>
+        </p:style>
+        <p:txBody>
+          <a:bodyPr rtlCol="0" anchor="ctr"/>
+          <a:lstStyle/>
+          <a:p>
+            <a:pPr algn="ctr"/>
+          </a:p>
+        </p:txBody>
+      </p:sp>
+      <p:sp>
+        <p:nvSpPr>
+          <p:cNvPr id="9" name="Rounded Rectangle 8"/>
+          <p:cNvSpPr/>
+          <p:nvPr/>
+        </p:nvSpPr>
+        <p:spPr>
+          <a:xfrm>
+            <a:off x="2000250" y="1181100"/>
+            <a:ext cx="123825" cy="123825"/>
+          </a:xfrm>
+          <a:prstGeom prst="roundRect">
+            <a:avLst>
+              <a:gd name="adj" fmla="val 8000"/>
+            </a:avLst>
+          </a:prstGeom>
+          <a:solidFill>
+            <a:srgbClr val="34D399"/>
+          </a:solidFill>
+          <a:ln>
+            <a:noFill/>
+          </a:ln>
+          <a:effectLst/>
+        </p:spPr>
+        <p:style>
+          <a:lnRef idx="1">
+            <a:schemeClr val="accent1"/>
+          </a:lnRef>
+          <a:fillRef idx="3">
+            <a:schemeClr val="accent1"/>
+          </a:fillRef>
+          <a:effectRef idx="2">
+            <a:schemeClr val="accent1"/>
+          </a:effectRef>
+          <a:fontRef idx="minor">
+            <a:schemeClr val="lt1"/>
+          </a:fontRef>
+        </p:style>
+        <p:txBody>
+          <a:bodyPr rtlCol="0" anchor="ctr"/>
+          <a:lstStyle/>
+          <a:p>
+            <a:pPr algn="ctr"/>
+          </a:p>
+        </p:txBody>
+      </p:sp>
+      <p:sp>
+        <p:nvSpPr>
+          <p:cNvPr id="10" name="TextBox 9"/>
           <p:cNvSpPr txBox="1"/>
           <p:nvPr/>
         </p:nvSpPr>
         <p:spPr>
           <a:xfrm>
-            <a:off x="9334500" y="0"/>
-            <a:ext cx="2667000" cy="704850"/>
+            <a:off x="2381250" y="1047750"/>
+            <a:ext cx="8286750" cy="381000"/>
+          </a:xfrm>
+          <a:prstGeom prst="rect">
+            <a:avLst/>
+          </a:prstGeom>
+          <a:noFill/>
+        </p:spPr>
+        <p:txBody>
+          <a:bodyPr wrap="square" anchor="ctr">
+            <a:spAutoFit/>
+          </a:bodyPr>
+          <a:lstStyle/>
+          <a:p>
+            <a:pPr algn="l">
+              <a:lnSpc>
+                <a:spcPct val="100000"/>
+              </a:lnSpc>
+            </a:pPr>
+            <a:r>
+              <a:rPr sz="1100" b="0">
+                <a:solidFill>
+                  <a:srgbClr val="94A3B8"/>
+                </a:solidFill>
+                <a:latin typeface="PingFang SC"/>
+              </a:rPr>
+              <a:t>terminal — 平台实测</a:t>
+            </a:r>
+          </a:p>
+        </p:txBody>
+      </p:sp>
+      <p:sp>
+        <p:nvSpPr>
+          <p:cNvPr id="11" name="TextBox 10"/>
+          <p:cNvSpPr txBox="1"/>
+          <p:nvPr/>
+        </p:nvSpPr>
+        <p:spPr>
+          <a:xfrm>
+            <a:off x="1562100" y="1581150"/>
+            <a:ext cx="9067800" cy="1714500"/>
+          </a:xfrm>
+          <a:prstGeom prst="rect">
+            <a:avLst/>
+          </a:prstGeom>
+          <a:noFill/>
+        </p:spPr>
+        <p:txBody>
+          <a:bodyPr wrap="square">
+            <a:spAutoFit/>
+          </a:bodyPr>
+          <a:lstStyle/>
+          <a:p>
+            <a:pPr>
+              <a:lnSpc>
+                <a:spcPct val="115000"/>
+              </a:lnSpc>
+            </a:pPr>
+            <a:r>
+              <a:rPr sz="1300" b="1">
+                <a:solidFill>
+                  <a:srgbClr val="34D399"/>
+                </a:solidFill>
+                <a:latin typeface="Menlo"/>
+              </a:rPr>
+              <a:t>$ report = await sup.run(争议任务, tasks, workers)</a:t>
+            </a:r>
+          </a:p>
+          <a:p>
+            <a:pPr>
+              <a:lnSpc>
+                <a:spcPct val="115000"/>
+              </a:lnSpc>
+            </a:pPr>
+            <a:r>
+              <a:rPr sz="1300">
+                <a:solidFill>
+                  <a:srgbClr val="CBD5E1"/>
+                </a:solidFill>
+                <a:latin typeface="Menlo"/>
+              </a:rPr>
+              <a:t>Conflict(field='verdict', conclusions=['结论甲','结论乙'])</a:t>
+            </a:r>
+          </a:p>
+          <a:p>
+            <a:pPr>
+              <a:lnSpc>
+                <a:spcPct val="115000"/>
+              </a:lnSpc>
+            </a:pPr>
+            <a:r>
+              <a:rPr sz="1300">
+                <a:solidFill>
+                  <a:srgbClr val="CBD5E1"/>
+                </a:solidFill>
+                <a:latin typeface="Menlo"/>
+              </a:rPr>
+              <a:t>arbitrated_verdict='结论乙'  # 证据×3&gt;×1</a:t>
+            </a:r>
+          </a:p>
+          <a:p>
+            <a:pPr>
+              <a:lnSpc>
+                <a:spcPct val="115000"/>
+              </a:lnSpc>
+            </a:pPr>
+            <a:r>
+              <a:rPr sz="1300">
+                <a:solidFill>
+                  <a:srgbClr val="94A3B8"/>
+                </a:solidFill>
+                <a:latin typeface="Menlo"/>
+              </a:rPr>
+              <a:t># 同 aspect 才冲突:误报为零</a:t>
+            </a:r>
+          </a:p>
+        </p:txBody>
+      </p:sp>
+      <p:sp>
+        <p:nvSpPr>
+          <p:cNvPr id="12" name="TextBox 11"/>
+          <p:cNvSpPr txBox="1"/>
+          <p:nvPr/>
+        </p:nvSpPr>
+        <p:spPr>
+          <a:xfrm>
+            <a:off x="10287000" y="6534150"/>
+            <a:ext cx="1619250" cy="266700"/>
           </a:xfrm>
           <a:prstGeom prst="rect">
             <a:avLst/>
@@ -10929,351 +11283,6 @@
               </a:lnSpc>
             </a:pPr>
             <a:r>
-              <a:rPr sz="1100" b="0">
-                <a:solidFill>
-                  <a:srgbClr val="94A3B8"/>
-                </a:solidFill>
-                <a:latin typeface="PingFang SC"/>
-              </a:rPr>
-              <a:t>tests 真实断言</a:t>
-            </a:r>
-          </a:p>
-        </p:txBody>
-      </p:sp>
-      <p:sp>
-        <p:nvSpPr>
-          <p:cNvPr id="6" name="Rounded Rectangle 5"/>
-          <p:cNvSpPr/>
-          <p:nvPr/>
-        </p:nvSpPr>
-        <p:spPr>
-          <a:xfrm>
-            <a:off x="1333500" y="952500"/>
-            <a:ext cx="9525000" cy="5048250"/>
-          </a:xfrm>
-          <a:prstGeom prst="roundRect">
-            <a:avLst>
-              <a:gd name="adj" fmla="val 8000"/>
-            </a:avLst>
-          </a:prstGeom>
-          <a:solidFill>
-            <a:srgbClr val="0D1117"/>
-          </a:solidFill>
-          <a:ln>
-            <a:noFill/>
-          </a:ln>
-          <a:effectLst/>
-        </p:spPr>
-        <p:style>
-          <a:lnRef idx="1">
-            <a:schemeClr val="accent1"/>
-          </a:lnRef>
-          <a:fillRef idx="3">
-            <a:schemeClr val="accent1"/>
-          </a:fillRef>
-          <a:effectRef idx="2">
-            <a:schemeClr val="accent1"/>
-          </a:effectRef>
-          <a:fontRef idx="minor">
-            <a:schemeClr val="lt1"/>
-          </a:fontRef>
-        </p:style>
-        <p:txBody>
-          <a:bodyPr rtlCol="0" anchor="ctr"/>
-          <a:lstStyle/>
-          <a:p>
-            <a:pPr algn="ctr"/>
-          </a:p>
-        </p:txBody>
-      </p:sp>
-      <p:sp>
-        <p:nvSpPr>
-          <p:cNvPr id="7" name="Rectangle 6"/>
-          <p:cNvSpPr/>
-          <p:nvPr/>
-        </p:nvSpPr>
-        <p:spPr>
-          <a:xfrm>
-            <a:off x="1333500" y="952500"/>
-            <a:ext cx="9525000" cy="381000"/>
-          </a:xfrm>
-          <a:prstGeom prst="rect">
-            <a:avLst/>
-          </a:prstGeom>
-          <a:solidFill>
-            <a:srgbClr val="1F2937"/>
-          </a:solidFill>
-          <a:ln>
-            <a:noFill/>
-          </a:ln>
-          <a:effectLst/>
-        </p:spPr>
-        <p:style>
-          <a:lnRef idx="1">
-            <a:schemeClr val="accent1"/>
-          </a:lnRef>
-          <a:fillRef idx="3">
-            <a:schemeClr val="accent1"/>
-          </a:fillRef>
-          <a:effectRef idx="2">
-            <a:schemeClr val="accent1"/>
-          </a:effectRef>
-          <a:fontRef idx="minor">
-            <a:schemeClr val="lt1"/>
-          </a:fontRef>
-        </p:style>
-        <p:txBody>
-          <a:bodyPr rtlCol="0" anchor="ctr"/>
-          <a:lstStyle/>
-          <a:p>
-            <a:pPr algn="ctr"/>
-          </a:p>
-        </p:txBody>
-      </p:sp>
-      <p:sp>
-        <p:nvSpPr>
-          <p:cNvPr id="8" name="Rounded Rectangle 7"/>
-          <p:cNvSpPr/>
-          <p:nvPr/>
-        </p:nvSpPr>
-        <p:spPr>
-          <a:xfrm>
-            <a:off x="1504950" y="1085850"/>
-            <a:ext cx="123825" cy="123825"/>
-          </a:xfrm>
-          <a:prstGeom prst="roundRect">
-            <a:avLst>
-              <a:gd name="adj" fmla="val 8000"/>
-            </a:avLst>
-          </a:prstGeom>
-          <a:solidFill>
-            <a:srgbClr val="F87171"/>
-          </a:solidFill>
-          <a:ln>
-            <a:noFill/>
-          </a:ln>
-          <a:effectLst/>
-        </p:spPr>
-        <p:style>
-          <a:lnRef idx="1">
-            <a:schemeClr val="accent1"/>
-          </a:lnRef>
-          <a:fillRef idx="3">
-            <a:schemeClr val="accent1"/>
-          </a:fillRef>
-          <a:effectRef idx="2">
-            <a:schemeClr val="accent1"/>
-          </a:effectRef>
-          <a:fontRef idx="minor">
-            <a:schemeClr val="lt1"/>
-          </a:fontRef>
-        </p:style>
-        <p:txBody>
-          <a:bodyPr rtlCol="0" anchor="ctr"/>
-          <a:lstStyle/>
-          <a:p>
-            <a:pPr algn="ctr"/>
-          </a:p>
-        </p:txBody>
-      </p:sp>
-      <p:sp>
-        <p:nvSpPr>
-          <p:cNvPr id="9" name="Rounded Rectangle 8"/>
-          <p:cNvSpPr/>
-          <p:nvPr/>
-        </p:nvSpPr>
-        <p:spPr>
-          <a:xfrm>
-            <a:off x="1752600" y="1085850"/>
-            <a:ext cx="123825" cy="123825"/>
-          </a:xfrm>
-          <a:prstGeom prst="roundRect">
-            <a:avLst>
-              <a:gd name="adj" fmla="val 8000"/>
-            </a:avLst>
-          </a:prstGeom>
-          <a:solidFill>
-            <a:srgbClr val="F59E0B"/>
-          </a:solidFill>
-          <a:ln>
-            <a:noFill/>
-          </a:ln>
-          <a:effectLst/>
-        </p:spPr>
-        <p:style>
-          <a:lnRef idx="1">
-            <a:schemeClr val="accent1"/>
-          </a:lnRef>
-          <a:fillRef idx="3">
-            <a:schemeClr val="accent1"/>
-          </a:fillRef>
-          <a:effectRef idx="2">
-            <a:schemeClr val="accent1"/>
-          </a:effectRef>
-          <a:fontRef idx="minor">
-            <a:schemeClr val="lt1"/>
-          </a:fontRef>
-        </p:style>
-        <p:txBody>
-          <a:bodyPr rtlCol="0" anchor="ctr"/>
-          <a:lstStyle/>
-          <a:p>
-            <a:pPr algn="ctr"/>
-          </a:p>
-        </p:txBody>
-      </p:sp>
-      <p:sp>
-        <p:nvSpPr>
-          <p:cNvPr id="10" name="Rounded Rectangle 9"/>
-          <p:cNvSpPr/>
-          <p:nvPr/>
-        </p:nvSpPr>
-        <p:spPr>
-          <a:xfrm>
-            <a:off x="2000250" y="1085850"/>
-            <a:ext cx="123825" cy="123825"/>
-          </a:xfrm>
-          <a:prstGeom prst="roundRect">
-            <a:avLst>
-              <a:gd name="adj" fmla="val 8000"/>
-            </a:avLst>
-          </a:prstGeom>
-          <a:solidFill>
-            <a:srgbClr val="34D399"/>
-          </a:solidFill>
-          <a:ln>
-            <a:noFill/>
-          </a:ln>
-          <a:effectLst/>
-        </p:spPr>
-        <p:style>
-          <a:lnRef idx="1">
-            <a:schemeClr val="accent1"/>
-          </a:lnRef>
-          <a:fillRef idx="3">
-            <a:schemeClr val="accent1"/>
-          </a:fillRef>
-          <a:effectRef idx="2">
-            <a:schemeClr val="accent1"/>
-          </a:effectRef>
-          <a:fontRef idx="minor">
-            <a:schemeClr val="lt1"/>
-          </a:fontRef>
-        </p:style>
-        <p:txBody>
-          <a:bodyPr rtlCol="0" anchor="ctr"/>
-          <a:lstStyle/>
-          <a:p>
-            <a:pPr algn="ctr"/>
-          </a:p>
-        </p:txBody>
-      </p:sp>
-      <p:sp>
-        <p:nvSpPr>
-          <p:cNvPr id="11" name="TextBox 10"/>
-          <p:cNvSpPr txBox="1"/>
-          <p:nvPr/>
-        </p:nvSpPr>
-        <p:spPr>
-          <a:xfrm>
-            <a:off x="2381250" y="952500"/>
-            <a:ext cx="8286750" cy="381000"/>
-          </a:xfrm>
-          <a:prstGeom prst="rect">
-            <a:avLst/>
-          </a:prstGeom>
-          <a:noFill/>
-        </p:spPr>
-        <p:txBody>
-          <a:bodyPr wrap="square" anchor="ctr">
-            <a:spAutoFit/>
-          </a:bodyPr>
-          <a:lstStyle/>
-          <a:p>
-            <a:pPr algn="l">
-              <a:lnSpc>
-                <a:spcPct val="100000"/>
-              </a:lnSpc>
-            </a:pPr>
-            <a:r>
-              <a:rPr sz="1100" b="0">
-                <a:solidFill>
-                  <a:srgbClr val="94A3B8"/>
-                </a:solidFill>
-                <a:latin typeface="PingFang SC"/>
-              </a:rPr>
-              <a:t>terminal — 平台实测</a:t>
-            </a:r>
-          </a:p>
-        </p:txBody>
-      </p:sp>
-      <p:sp>
-        <p:nvSpPr>
-          <p:cNvPr id="12" name="TextBox 11"/>
-          <p:cNvSpPr txBox="1"/>
-          <p:nvPr/>
-        </p:nvSpPr>
-        <p:spPr>
-          <a:xfrm>
-            <a:off x="1562100" y="1485900"/>
-            <a:ext cx="9067800" cy="4381500"/>
-          </a:xfrm>
-          <a:prstGeom prst="rect">
-            <a:avLst/>
-          </a:prstGeom>
-          <a:noFill/>
-        </p:spPr>
-        <p:txBody>
-          <a:bodyPr wrap="square">
-            <a:spAutoFit/>
-          </a:bodyPr>
-          <a:lstStyle/>
-          <a:p>
-            <a:pPr>
-              <a:lnSpc>
-                <a:spcPct val="115000"/>
-              </a:lnSpc>
-            </a:pPr>
-            <a:r>
-              <a:rPr sz="1300">
-                <a:solidFill>
-                  <a:srgbClr val="CBD5E1"/>
-                </a:solidFill>
-                <a:latin typeface="Menlo"/>
-              </a:rPr>
-              <a:t>tests 真实断言</a:t>
-            </a:r>
-          </a:p>
-        </p:txBody>
-      </p:sp>
-      <p:sp>
-        <p:nvSpPr>
-          <p:cNvPr id="13" name="TextBox 12"/>
-          <p:cNvSpPr txBox="1"/>
-          <p:nvPr/>
-        </p:nvSpPr>
-        <p:spPr>
-          <a:xfrm>
-            <a:off x="10287000" y="6534150"/>
-            <a:ext cx="1619250" cy="266700"/>
-          </a:xfrm>
-          <a:prstGeom prst="rect">
-            <a:avLst/>
-          </a:prstGeom>
-          <a:noFill/>
-        </p:spPr>
-        <p:txBody>
-          <a:bodyPr wrap="square" anchor="ctr">
-            <a:spAutoFit/>
-          </a:bodyPr>
-          <a:lstStyle/>
-          <a:p>
-            <a:pPr algn="r">
-              <a:lnSpc>
-                <a:spcPct val="100000"/>
-              </a:lnSpc>
-            </a:pPr>
-            <a:r>
               <a:rPr sz="900" b="0">
                 <a:solidFill>
                   <a:srgbClr val="94A3B8"/>
@@ -11287,7 +11296,7 @@
       </p:sp>
       <p:sp>
         <p:nvSpPr>
-          <p:cNvPr id="14" name="TextBox 13"/>
+          <p:cNvPr id="13" name="TextBox 12"/>
           <p:cNvSpPr txBox="1"/>
           <p:nvPr/>
         </p:nvSpPr>
@@ -21825,7 +21834,7 @@
                 </a:solidFill>
                 <a:latin typeface="PingFang SC"/>
               </a:rPr>
-              <a:t>Token+时长双上限|受限的完整代理</a:t>
+              <a:t>Token+时长双上限</a:t>
             </a:r>
           </a:p>
         </p:txBody>
@@ -24835,7 +24844,7 @@
                 </a:solidFill>
                 <a:latin typeface="PingFang SC"/>
               </a:rPr>
-              <a:t>完成定义|缺一项就是糊涂账</a:t>
+              <a:t>完成定义</a:t>
             </a:r>
           </a:p>
         </p:txBody>
